--- a/assets/ppts/M2.2.5_NextGen_IPv6.pptx
+++ b/assets/ppts/M2.2.5_NextGen_IPv6.pptx
@@ -8,6 +8,7 @@
     <p:sldId id="256" r:id="rId7"/>
     <p:sldId id="257" r:id="rId8"/>
     <p:sldId id="258" r:id="rId9"/>
+    <p:sldId id="259" r:id="rId10"/>
   </p:sldIdLst>
   <p:sldSz cx="12191695" cy="6858000" type="screen4x3"/>
   <p:notesSz cx="6858000" cy="9144000"/>
@@ -3141,8 +3142,8 @@
         </p:nvSpPr>
         <p:spPr>
           <a:xfrm>
-            <a:off x="822960" y="1188720"/>
-            <a:ext cx="164592" cy="4480560"/>
+            <a:off x="0" y="0"/>
+            <a:ext cx="12191695" cy="137160"/>
           </a:xfrm>
           <a:prstGeom prst="rect">
             <a:avLst/>
@@ -3178,14 +3179,57 @@
       </p:sp>
       <p:sp>
         <p:nvSpPr>
-          <p:cNvPr id="4" name="TextBox 3"/>
+          <p:cNvPr id="4" name="Rectangle 3"/>
+          <p:cNvSpPr/>
+          <p:nvPr/>
+        </p:nvSpPr>
+        <p:spPr>
+          <a:xfrm>
+            <a:off x="822960" y="1097280"/>
+            <a:ext cx="164592" cy="4663440"/>
+          </a:xfrm>
+          <a:prstGeom prst="rect">
+            <a:avLst/>
+          </a:prstGeom>
+          <a:solidFill>
+            <a:srgbClr val="D97706"/>
+          </a:solidFill>
+          <a:ln>
+            <a:noFill/>
+          </a:ln>
+        </p:spPr>
+        <p:style>
+          <a:lnRef idx="1">
+            <a:schemeClr val="accent1"/>
+          </a:lnRef>
+          <a:fillRef idx="3">
+            <a:schemeClr val="accent1"/>
+          </a:fillRef>
+          <a:effectRef idx="2">
+            <a:schemeClr val="accent1"/>
+          </a:effectRef>
+          <a:fontRef idx="minor">
+            <a:schemeClr val="lt1"/>
+          </a:fontRef>
+        </p:style>
+        <p:txBody>
+          <a:bodyPr rtlCol="0" anchor="ctr"/>
+          <a:lstStyle/>
+          <a:p>
+            <a:pPr algn="ctr"/>
+          </a:p>
+        </p:txBody>
+      </p:sp>
+      <p:sp>
+        <p:nvSpPr>
+          <p:cNvPr id="5" name="TextBox 4"/>
           <p:cNvSpPr txBox="1"/>
           <p:nvPr/>
         </p:nvSpPr>
         <p:spPr>
           <a:xfrm>
-            <a:off x="1280160" y="1097280"/>
-            <a:ext cx="10058400" cy="4663440"/>
+            <a:off x="1234440" y="1005840"/>
+            <a:ext cx="10241280" cy="4846320"/>
           </a:xfrm>
           <a:prstGeom prst="rect">
             <a:avLst/>
@@ -3200,70 +3244,165 @@
           <a:p>
             <a:pPr>
               <a:spcAft>
+                <a:spcPts val="1000"/>
+              </a:spcAft>
+              <a:defRPr b="1" sz="1300">
+                <a:solidFill>
+                  <a:srgbClr val="D97706"/>
+                </a:solidFill>
+              </a:defRPr>
+            </a:pPr>
+            <a:r>
+              <a:t>PCCST501 Computer Networks | KTU 2024 Scheme • MODULE 2 • M2.2.5</a:t>
+            </a:r>
+          </a:p>
+          <a:p>
+            <a:pPr>
+              <a:spcAft>
                 <a:spcPts val="1200"/>
               </a:spcAft>
-              <a:defRPr b="1" sz="1300">
-                <a:solidFill>
-                  <a:srgbClr val="D97706"/>
+              <a:defRPr b="1" sz="3000">
+                <a:solidFill>
+                  <a:srgbClr val="F8FAFC"/>
                 </a:solidFill>
               </a:defRPr>
             </a:pPr>
             <a:r>
-              <a:t>PCCST501 Computer Networks | KTU 2024 Scheme • MODULE 2 • M2.2.5</a:t>
+              <a:t>Next Generation IP: IPv6 Architecture</a:t>
             </a:r>
           </a:p>
           <a:p>
             <a:pPr>
               <a:spcAft>
-                <a:spcPts val="1400"/>
+                <a:spcPts val="2400"/>
               </a:spcAft>
-              <a:defRPr b="1" sz="3200">
-                <a:solidFill>
-                  <a:srgbClr val="F8FAFC"/>
+              <a:defRPr sz="1600">
+                <a:solidFill>
+                  <a:srgbClr val="94A3B8"/>
                 </a:solidFill>
               </a:defRPr>
             </a:pPr>
             <a:r>
-              <a:t>Next Generation Internet Protocol (IPv6)</a:t>
+              <a:t>IPv6 128-Bit Addressing, 40-Byte Fixed Header, Extension Headers, IPv4 vs IPv6 Comparison, Transition Strategies (Dual Stack, Tunneling, NAT64)</a:t>
             </a:r>
           </a:p>
           <a:p>
             <a:pPr>
               <a:spcAft>
-                <a:spcPts val="2800"/>
+                <a:spcPts val="300"/>
               </a:spcAft>
-              <a:defRPr sz="1700">
+              <a:defRPr b="1" sz="1350">
+                <a:solidFill>
+                  <a:srgbClr val="E2E8F0"/>
+                </a:solidFill>
+              </a:defRPr>
+            </a:pPr>
+            <a:r>
+              <a:t>Prepared by: Prof. Anju Markose | Assistant Professor, Dept. of CSE | VJCET</a:t>
+            </a:r>
+          </a:p>
+          <a:p>
+            <a:pPr>
+              <a:defRPr sz="1150">
                 <a:solidFill>
                   <a:srgbClr val="94A3B8"/>
                 </a:solidFill>
               </a:defRPr>
             </a:pPr>
             <a:r>
-              <a:t>128-Bit Addressing, Fixed 40-Byte Base Header, Extension Headers Chain, SLAAC Autoconfiguration &amp; Migration</a:t>
-            </a:r>
-          </a:p>
+              <a:t>Viswajyothi College of Engineering and Technology (VJCET), Vazhakulam • KTU S5 CSE</a:t>
+            </a:r>
+          </a:p>
+        </p:txBody>
+      </p:sp>
+      <p:sp>
+        <p:nvSpPr>
+          <p:cNvPr id="6" name="Rounded Rectangle 5"/>
+          <p:cNvSpPr/>
+          <p:nvPr/>
+        </p:nvSpPr>
+        <p:spPr>
+          <a:xfrm>
+            <a:off x="8412480" y="5120640"/>
+            <a:ext cx="3017520" cy="822960"/>
+          </a:xfrm>
+          <a:prstGeom prst="roundRect">
+            <a:avLst/>
+          </a:prstGeom>
+          <a:solidFill>
+            <a:srgbClr val="1E293B"/>
+          </a:solidFill>
+          <a:ln w="12700">
+            <a:solidFill>
+              <a:srgbClr val="0E7490"/>
+            </a:solidFill>
+          </a:ln>
+        </p:spPr>
+        <p:style>
+          <a:lnRef idx="1">
+            <a:schemeClr val="accent1"/>
+          </a:lnRef>
+          <a:fillRef idx="3">
+            <a:schemeClr val="accent1"/>
+          </a:fillRef>
+          <a:effectRef idx="2">
+            <a:schemeClr val="accent1"/>
+          </a:effectRef>
+          <a:fontRef idx="minor">
+            <a:schemeClr val="lt1"/>
+          </a:fontRef>
+        </p:style>
+        <p:txBody>
+          <a:bodyPr rtlCol="0" anchor="ctr"/>
+          <a:lstStyle/>
+          <a:p>
+            <a:pPr algn="ctr"/>
+          </a:p>
+        </p:txBody>
+      </p:sp>
+      <p:sp>
+        <p:nvSpPr>
+          <p:cNvPr id="7" name="TextBox 6"/>
+          <p:cNvSpPr txBox="1"/>
+          <p:nvPr/>
+        </p:nvSpPr>
+        <p:spPr>
+          <a:xfrm>
+            <a:off x="8503920" y="5166360"/>
+            <a:ext cx="2834640" cy="731520"/>
+          </a:xfrm>
+          <a:prstGeom prst="rect">
+            <a:avLst/>
+          </a:prstGeom>
+          <a:noFill/>
+        </p:spPr>
+        <p:txBody>
+          <a:bodyPr wrap="none">
+            <a:spAutoFit/>
+          </a:bodyPr>
+          <a:lstStyle/>
           <a:p>
             <a:pPr>
-              <a:defRPr b="1" sz="1300">
-                <a:solidFill>
-                  <a:srgbClr val="E2E8F0"/>
+              <a:defRPr b="1" sz="1050">
+                <a:solidFill>
+                  <a:srgbClr val="D97706"/>
                 </a:solidFill>
               </a:defRPr>
             </a:pPr>
             <a:r>
-              <a:t>Prepared by: Prof. Anju Markose | Assistant Professor, Dept. of CSE | VJCET</a:t>
+              <a:t>KTU B.Tech Curriculum</a:t>
             </a:r>
           </a:p>
           <a:p>
             <a:pPr>
-              <a:defRPr sz="1100">
-                <a:solidFill>
-                  <a:srgbClr val="94A3B8"/>
+              <a:defRPr sz="950">
+                <a:solidFill>
+                  <a:srgbClr val="F8FAFC"/>
                 </a:solidFill>
               </a:defRPr>
             </a:pPr>
             <a:r>
-              <a:t>Viswajyothi College of Engineering and Technology (VJCET), Vazhakulam</a:t>
+              <a:t>Official Classroom Slide Deck</a:t>
             </a:r>
           </a:p>
         </p:txBody>
@@ -3395,14 +3534,14 @@
           <a:lstStyle/>
           <a:p>
             <a:pPr>
-              <a:defRPr b="1" sz="2300">
+              <a:defRPr b="1" sz="2200">
                 <a:solidFill>
                   <a:srgbClr val="F8FAFC"/>
                 </a:solidFill>
               </a:defRPr>
             </a:pPr>
             <a:r>
-              <a:t>2.2.5.1 IPv6 Header Architecture</a:t>
+              <a:t>2.2.5.1 IPv6 Addressing &amp; 40-Byte Fixed Header</a:t>
             </a:r>
           </a:p>
         </p:txBody>
@@ -3437,7 +3576,7 @@
               </a:defRPr>
             </a:pPr>
             <a:r>
-              <a:t>M2.2.5 IPV6 HEADER</a:t>
+              <a:t>M2.2.5 IPV6 ARCHITECTURE</a:t>
             </a:r>
           </a:p>
         </p:txBody>
@@ -3450,7 +3589,7 @@
         </p:nvSpPr>
         <p:spPr>
           <a:xfrm>
-            <a:off x="731520" y="1280160"/>
+            <a:off x="731520" y="1234440"/>
             <a:ext cx="6858000" cy="4937760"/>
           </a:xfrm>
           <a:prstGeom prst="rect">
@@ -3468,29 +3607,29 @@
               <a:spcAft>
                 <a:spcPts val="200"/>
               </a:spcAft>
-              <a:defRPr b="1" sz="1500">
+              <a:defRPr b="1" sz="1450">
                 <a:solidFill>
                   <a:srgbClr val="0F1E4A"/>
                 </a:solidFill>
               </a:defRPr>
             </a:pPr>
             <a:r>
-              <a:t>• 128-Bit Address Space</a:t>
+              <a:t>• Motivation for IPv6</a:t>
             </a:r>
           </a:p>
           <a:p>
             <a:pPr>
               <a:spcAft>
-                <a:spcPts val="800"/>
+                <a:spcPts val="700"/>
               </a:spcAft>
-              <a:defRPr sz="1300">
-                <a:solidFill>
-                  <a:srgbClr val="1E293B"/>
+              <a:defRPr sz="1250">
+                <a:solidFill>
+                  <a:srgbClr val="0F172A"/>
                 </a:solidFill>
               </a:defRPr>
             </a:pPr>
             <a:r>
-              <a:t>   $2^{128} \approx 3.4 \times 10^{38}$ unique addresses (represented as 8 groups of 4 hex digits: `2001:0db8:85a3:0000:0000:8a2e:0370:7334`).</a:t>
+              <a:t>   Exhaustion of the 32-bit IPv4 address space ($2^{32} \approx 4.3 \times 10^9$ addresses). IPv6 provides $2^{128} \approx 3.4 \times 10^{38}$ unique addresses.</a:t>
             </a:r>
           </a:p>
           <a:p>
@@ -3498,29 +3637,29 @@
               <a:spcAft>
                 <a:spcPts val="200"/>
               </a:spcAft>
-              <a:defRPr b="1" sz="1500">
+              <a:defRPr b="1" sz="1450">
                 <a:solidFill>
                   <a:srgbClr val="0F1E4A"/>
                 </a:solidFill>
               </a:defRPr>
             </a:pPr>
             <a:r>
-              <a:t>• Fixed 40-Byte Base Header</a:t>
+              <a:t>• IPv6 Address Notation</a:t>
             </a:r>
           </a:p>
           <a:p>
             <a:pPr>
               <a:spcAft>
-                <a:spcPts val="800"/>
+                <a:spcPts val="700"/>
               </a:spcAft>
-              <a:defRPr sz="1300">
-                <a:solidFill>
-                  <a:srgbClr val="1E293B"/>
+              <a:defRPr sz="1250">
+                <a:solidFill>
+                  <a:srgbClr val="0F172A"/>
                 </a:solidFill>
               </a:defRPr>
             </a:pPr>
             <a:r>
-              <a:t>   Fixed length streamlines router processing in hardware ASICs (compared to variable 20-60B IPv4 header).</a:t>
+              <a:t>   8 groups of 4 hexadecimal digits separated by colons (e.g., `2001:0db8:85a3:0000:0000:8a2e:0370:7334`). Leading zeros omitted (`2001:db8:85a3::8a2e:370:7334`); `::` compresses consecutive zero blocks once.</a:t>
             </a:r>
           </a:p>
           <a:p>
@@ -3528,29 +3667,29 @@
               <a:spcAft>
                 <a:spcPts val="200"/>
               </a:spcAft>
-              <a:defRPr b="1" sz="1500">
+              <a:defRPr b="1" sz="1450">
                 <a:solidFill>
                   <a:srgbClr val="0F1E4A"/>
                 </a:solidFill>
               </a:defRPr>
             </a:pPr>
             <a:r>
-              <a:t>• Key Header Fields</a:t>
+              <a:t>• 40-Byte Fixed Header Format</a:t>
             </a:r>
           </a:p>
           <a:p>
             <a:pPr>
               <a:spcAft>
-                <a:spcPts val="800"/>
+                <a:spcPts val="700"/>
               </a:spcAft>
-              <a:defRPr sz="1300">
-                <a:solidFill>
-                  <a:srgbClr val="1E293B"/>
+              <a:defRPr sz="1250">
+                <a:solidFill>
+                  <a:srgbClr val="0F172A"/>
                 </a:solidFill>
               </a:defRPr>
             </a:pPr>
             <a:r>
-              <a:t>   Version (4b: 6), Traffic Class (8b: QoS DiffServ), Flow Label (20b: maintains flow context), Payload Length (16b), Next Header (8b: identifies upper layer protocol or next extension header), Hop Limit (8b: replaces TTL), Source Address (128b), Destination Address (128b).</a:t>
+              <a:t>   Version (4b: 6) | Traffic Class (8b: QoS DSCP) | Flow Label (20b: identifies packet flow for non-default routing) \n Payload Length (16b: data + extension headers) | Next Header (8b: specifies upper layer or extension header) | Hop Limit (8b: decremented per hop, replaces TTL) \n Source IPv6 Address (128 bits / 16 bytes) \n Destination IPv6 Address (128 bits / 16 bytes).</a:t>
             </a:r>
           </a:p>
           <a:p>
@@ -3558,29 +3697,29 @@
               <a:spcAft>
                 <a:spcPts val="200"/>
               </a:spcAft>
-              <a:defRPr b="1" sz="1500">
+              <a:defRPr b="1" sz="1450">
                 <a:solidFill>
                   <a:srgbClr val="0F1E4A"/>
                 </a:solidFill>
               </a:defRPr>
             </a:pPr>
             <a:r>
-              <a:t>• Eliminated Fields</a:t>
+              <a:t>• Key Structural Improvements</a:t>
             </a:r>
           </a:p>
           <a:p>
             <a:pPr>
               <a:spcAft>
-                <a:spcPts val="800"/>
+                <a:spcPts val="700"/>
               </a:spcAft>
-              <a:defRPr sz="1300">
-                <a:solidFill>
-                  <a:srgbClr val="1E293B"/>
+              <a:defRPr sz="1250">
+                <a:solidFill>
+                  <a:srgbClr val="0F172A"/>
                 </a:solidFill>
               </a:defRPr>
             </a:pPr>
             <a:r>
-              <a:t>   Header Checksum (eliminated to boost speed; left to L2/L4), IHL (fixed at 40B), and Fragmentation fields (moved to optional Extension Headers).</a:t>
+              <a:t>   No header checksum (speeds up router processing), no in-network fragmentation (handled via Path MTU Discovery by end hosts), fixed 40-byte base size.</a:t>
             </a:r>
           </a:p>
         </p:txBody>
@@ -3593,14 +3732,14 @@
         </p:nvSpPr>
         <p:spPr>
           <a:xfrm>
-            <a:off x="7955279" y="1280160"/>
-            <a:ext cx="3566160" cy="4846320"/>
+            <a:off x="7955279" y="1234440"/>
+            <a:ext cx="3566160" cy="4892040"/>
           </a:xfrm>
           <a:prstGeom prst="roundRect">
             <a:avLst/>
           </a:prstGeom>
           <a:solidFill>
-            <a:srgbClr val="F1F5F9"/>
+            <a:srgbClr val="F8FAFC"/>
           </a:solidFill>
           <a:ln w="19050">
             <a:solidFill>
@@ -3638,7 +3777,7 @@
         </p:nvSpPr>
         <p:spPr>
           <a:xfrm>
-            <a:off x="8138160" y="1417320"/>
+            <a:off x="8138160" y="1371600"/>
             <a:ext cx="3200400" cy="4572000"/>
           </a:xfrm>
           <a:prstGeom prst="rect">
@@ -3663,7 +3802,7 @@
               </a:defRPr>
             </a:pPr>
             <a:r>
-              <a:t>IPv6 vs IPv4 Header</a:t>
+              <a:t>Header Breakdown</a:t>
             </a:r>
           </a:p>
           <a:p>
@@ -3673,12 +3812,12 @@
               </a:spcAft>
               <a:defRPr sz="1200">
                 <a:solidFill>
-                  <a:srgbClr val="1E293B"/>
+                  <a:srgbClr val="0F172A"/>
                 </a:solidFill>
               </a:defRPr>
             </a:pPr>
             <a:r>
-              <a:t>→ Address: 128-bit vs 32-bit</a:t>
+              <a:t>→ Fixed Header: Exactly 40 Bytes</a:t>
             </a:r>
           </a:p>
           <a:p>
@@ -3688,12 +3827,12 @@
               </a:spcAft>
               <a:defRPr sz="1200">
                 <a:solidFill>
-                  <a:srgbClr val="1E293B"/>
+                  <a:srgbClr val="0F172A"/>
                 </a:solidFill>
               </a:defRPr>
             </a:pPr>
             <a:r>
-              <a:t>→ Base Header: 40B fixed vs 20-60B</a:t>
+              <a:t>→ Source IP: 128 bits (16 B)</a:t>
             </a:r>
           </a:p>
           <a:p>
@@ -3703,12 +3842,12 @@
               </a:spcAft>
               <a:defRPr sz="1200">
                 <a:solidFill>
-                  <a:srgbClr val="1E293B"/>
+                  <a:srgbClr val="0F172A"/>
                 </a:solidFill>
               </a:defRPr>
             </a:pPr>
             <a:r>
-              <a:t>→ Checksum: None vs 16-bit Header</a:t>
+              <a:t>→ Destination IP: 128 bits (16 B)</a:t>
             </a:r>
           </a:p>
           <a:p>
@@ -3718,12 +3857,12 @@
               </a:spcAft>
               <a:defRPr sz="1200">
                 <a:solidFill>
-                  <a:srgbClr val="1E293B"/>
+                  <a:srgbClr val="0F172A"/>
                 </a:solidFill>
               </a:defRPr>
             </a:pPr>
             <a:r>
-              <a:t>→ Fragmentation: Source only vs Routers</a:t>
+              <a:t>→ Hop Limit: Replaces TTL</a:t>
             </a:r>
           </a:p>
           <a:p>
@@ -3733,12 +3872,27 @@
               </a:spcAft>
               <a:defRPr sz="1200">
                 <a:solidFill>
-                  <a:srgbClr val="1E293B"/>
+                  <a:srgbClr val="0F172A"/>
                 </a:solidFill>
               </a:defRPr>
             </a:pPr>
             <a:r>
-              <a:t>→ TTL -&gt; Hop Limit (8 bits)</a:t>
+              <a:t>→ Next Header: Chains extensions</a:t>
+            </a:r>
+          </a:p>
+          <a:p>
+            <a:pPr>
+              <a:spcAft>
+                <a:spcPts val="600"/>
+              </a:spcAft>
+              <a:defRPr sz="1200">
+                <a:solidFill>
+                  <a:srgbClr val="0F172A"/>
+                </a:solidFill>
+              </a:defRPr>
+            </a:pPr>
+            <a:r>
+              <a:t>→ Flow Label: 20-bit stream tagging</a:t>
             </a:r>
           </a:p>
         </p:txBody>
@@ -3751,8 +3905,8 @@
         </p:nvSpPr>
         <p:spPr>
           <a:xfrm>
-            <a:off x="731520" y="6309360"/>
-            <a:ext cx="10789920" cy="365760"/>
+            <a:off x="731520" y="6327648"/>
+            <a:ext cx="10789920" cy="320040"/>
           </a:xfrm>
           <a:prstGeom prst="rect">
             <a:avLst/>
@@ -3774,6 +3928,41 @@
             </a:pPr>
             <a:r>
               <a:t>PCCST501 Computer Networks | KTU 2024 Scheme | Prof. Anju Markose | Assistant Professor, Dept. of CSE | VJCET</a:t>
+            </a:r>
+          </a:p>
+        </p:txBody>
+      </p:sp>
+      <p:sp>
+        <p:nvSpPr>
+          <p:cNvPr id="10" name="TextBox 9"/>
+          <p:cNvSpPr txBox="1"/>
+          <p:nvPr/>
+        </p:nvSpPr>
+        <p:spPr>
+          <a:xfrm>
+            <a:off x="6858000" y="6327648"/>
+            <a:ext cx="4572000" cy="320040"/>
+          </a:xfrm>
+          <a:prstGeom prst="rect">
+            <a:avLst/>
+          </a:prstGeom>
+          <a:noFill/>
+        </p:spPr>
+        <p:txBody>
+          <a:bodyPr wrap="none">
+            <a:spAutoFit/>
+          </a:bodyPr>
+          <a:lstStyle/>
+          <a:p>
+            <a:pPr algn="r">
+              <a:defRPr sz="950">
+                <a:solidFill>
+                  <a:srgbClr val="64748B"/>
+                </a:solidFill>
+              </a:defRPr>
+            </a:pPr>
+            <a:r>
+              <a:t>Dept. of CSE, VJCET</a:t>
             </a:r>
           </a:p>
         </p:txBody>
@@ -3905,14 +4094,14 @@
           <a:lstStyle/>
           <a:p>
             <a:pPr>
-              <a:defRPr b="1" sz="2300">
+              <a:defRPr b="1" sz="2200">
                 <a:solidFill>
                   <a:srgbClr val="F8FAFC"/>
                 </a:solidFill>
               </a:defRPr>
             </a:pPr>
             <a:r>
-              <a:t>2.2.5.2 Extension Headers, SLAAC &amp; IPv6 Migration</a:t>
+              <a:t>2.2.5.2 IPv4 vs IPv6 &amp; Transition Strategies</a:t>
             </a:r>
           </a:p>
         </p:txBody>
@@ -3947,204 +4136,31 @@
               </a:defRPr>
             </a:pPr>
             <a:r>
-              <a:t>M2.2.5 SLAAC &amp; TRANSITION</a:t>
-            </a:r>
-          </a:p>
-        </p:txBody>
-      </p:sp>
-      <p:sp>
-        <p:nvSpPr>
-          <p:cNvPr id="6" name="TextBox 5"/>
-          <p:cNvSpPr txBox="1"/>
-          <p:nvPr/>
-        </p:nvSpPr>
-        <p:spPr>
-          <a:xfrm>
-            <a:off x="731520" y="1280160"/>
-            <a:ext cx="6858000" cy="4937760"/>
-          </a:xfrm>
-          <a:prstGeom prst="rect">
-            <a:avLst/>
-          </a:prstGeom>
-          <a:noFill/>
-        </p:spPr>
-        <p:txBody>
-          <a:bodyPr wrap="square">
-            <a:spAutoFit/>
-          </a:bodyPr>
-          <a:lstStyle/>
-          <a:p>
-            <a:pPr>
-              <a:spcAft>
-                <a:spcPts val="200"/>
-              </a:spcAft>
-              <a:defRPr b="1" sz="1500">
-                <a:solidFill>
-                  <a:srgbClr val="0F1E4A"/>
-                </a:solidFill>
-              </a:defRPr>
-            </a:pPr>
-            <a:r>
-              <a:t>• Extension Headers Chain</a:t>
-            </a:r>
-          </a:p>
-          <a:p>
-            <a:pPr>
-              <a:spcAft>
-                <a:spcPts val="800"/>
-              </a:spcAft>
-              <a:defRPr sz="1300">
-                <a:solidFill>
-                  <a:srgbClr val="1E293B"/>
-                </a:solidFill>
-              </a:defRPr>
-            </a:pPr>
-            <a:r>
-              <a:t>   Daisy-chained via `Next Header` field: Hop-by-Hop Options $\to$ Routing $\to$ Fragment $\to$ Encapsulating Security Payload (ESP) $\to$ Authentication Header (AH) $\to$ TCP/UDP.</a:t>
-            </a:r>
-          </a:p>
-          <a:p>
-            <a:pPr>
-              <a:spcAft>
-                <a:spcPts val="200"/>
-              </a:spcAft>
-              <a:defRPr b="1" sz="1500">
-                <a:solidFill>
-                  <a:srgbClr val="0F1E4A"/>
-                </a:solidFill>
-              </a:defRPr>
-            </a:pPr>
-            <a:r>
-              <a:t>• Stateless Address Autoconfiguration (SLAAC)</a:t>
-            </a:r>
-          </a:p>
-          <a:p>
-            <a:pPr>
-              <a:spcAft>
-                <a:spcPts val="800"/>
-              </a:spcAft>
-              <a:defRPr sz="1300">
-                <a:solidFill>
-                  <a:srgbClr val="1E293B"/>
-                </a:solidFill>
-              </a:defRPr>
-            </a:pPr>
-            <a:r>
-              <a:t>   Host generates unique IPv6 address automatically using local link prefix advertised by router + modified EUI-64 MAC address (or randomized interface ID). No DHCP server required.</a:t>
-            </a:r>
-          </a:p>
-          <a:p>
-            <a:pPr>
-              <a:spcAft>
-                <a:spcPts val="200"/>
-              </a:spcAft>
-              <a:defRPr b="1" sz="1500">
-                <a:solidFill>
-                  <a:srgbClr val="0F1E4A"/>
-                </a:solidFill>
-              </a:defRPr>
-            </a:pPr>
-            <a:r>
-              <a:t>• Dual-Stack Transition</a:t>
-            </a:r>
-          </a:p>
-          <a:p>
-            <a:pPr>
-              <a:spcAft>
-                <a:spcPts val="800"/>
-              </a:spcAft>
-              <a:defRPr sz="1300">
-                <a:solidFill>
-                  <a:srgbClr val="1E293B"/>
-                </a:solidFill>
-              </a:defRPr>
-            </a:pPr>
-            <a:r>
-              <a:t>   Nodes implement both full IPv4 and IPv6 protocol stacks simultaneously, allowing seamless communication across both networks.</a:t>
-            </a:r>
-          </a:p>
-          <a:p>
-            <a:pPr>
-              <a:spcAft>
-                <a:spcPts val="200"/>
-              </a:spcAft>
-              <a:defRPr b="1" sz="1500">
-                <a:solidFill>
-                  <a:srgbClr val="0F1E4A"/>
-                </a:solidFill>
-              </a:defRPr>
-            </a:pPr>
-            <a:r>
-              <a:t>• Tunneling (6in4 / 6to4 / Teredo)</a:t>
-            </a:r>
-          </a:p>
-          <a:p>
-            <a:pPr>
-              <a:spcAft>
-                <a:spcPts val="800"/>
-              </a:spcAft>
-              <a:defRPr sz="1300">
-                <a:solidFill>
-                  <a:srgbClr val="1E293B"/>
-                </a:solidFill>
-              </a:defRPr>
-            </a:pPr>
-            <a:r>
-              <a:t>   IPv6 packets encapsulated as payload inside IPv4 packets to traverse legacy IPv4 routing backbones.</a:t>
-            </a:r>
-          </a:p>
-          <a:p>
-            <a:pPr>
-              <a:spcAft>
-                <a:spcPts val="200"/>
-              </a:spcAft>
-              <a:defRPr b="1" sz="1500">
-                <a:solidFill>
-                  <a:srgbClr val="0F1E4A"/>
-                </a:solidFill>
-              </a:defRPr>
-            </a:pPr>
-            <a:r>
-              <a:t>• NAT64 / DNS64</a:t>
-            </a:r>
-          </a:p>
-          <a:p>
-            <a:pPr>
-              <a:spcAft>
-                <a:spcPts val="800"/>
-              </a:spcAft>
-              <a:defRPr sz="1300">
-                <a:solidFill>
-                  <a:srgbClr val="1E293B"/>
-                </a:solidFill>
-              </a:defRPr>
-            </a:pPr>
-            <a:r>
-              <a:t>   Translates IPv6-only client requests to communicate directly with legacy IPv4-only web servers.</a:t>
-            </a:r>
-          </a:p>
-        </p:txBody>
-      </p:sp>
-      <p:sp>
-        <p:nvSpPr>
-          <p:cNvPr id="7" name="Rounded Rectangle 6"/>
+              <a:t>M2.2.5 IPV4 VS IPV6</a:t>
+            </a:r>
+          </a:p>
+        </p:txBody>
+      </p:sp>
+      <p:sp>
+        <p:nvSpPr>
+          <p:cNvPr id="6" name="Rounded Rectangle 5"/>
           <p:cNvSpPr/>
           <p:nvPr/>
         </p:nvSpPr>
         <p:spPr>
           <a:xfrm>
-            <a:off x="7955279" y="1280160"/>
-            <a:ext cx="3566160" cy="4846320"/>
+            <a:off x="731520" y="1234440"/>
+            <a:ext cx="5212080" cy="4892040"/>
           </a:xfrm>
           <a:prstGeom prst="roundRect">
             <a:avLst/>
           </a:prstGeom>
           <a:solidFill>
-            <a:srgbClr val="F1F5F9"/>
+            <a:srgbClr val="F8FAFC"/>
           </a:solidFill>
           <a:ln w="19050">
             <a:solidFill>
-              <a:srgbClr val="0E7490"/>
+              <a:srgbClr val="0F1E4A"/>
             </a:solidFill>
           </a:ln>
         </p:spPr>
@@ -4172,14 +4188,14 @@
       </p:sp>
       <p:sp>
         <p:nvSpPr>
-          <p:cNvPr id="8" name="TextBox 7"/>
+          <p:cNvPr id="7" name="TextBox 6"/>
           <p:cNvSpPr txBox="1"/>
           <p:nvPr/>
         </p:nvSpPr>
         <p:spPr>
           <a:xfrm>
-            <a:off x="8138160" y="1417320"/>
-            <a:ext cx="3200400" cy="4572000"/>
+            <a:off x="914400" y="1371600"/>
+            <a:ext cx="4846320" cy="4572000"/>
           </a:xfrm>
           <a:prstGeom prst="rect">
             <a:avLst/>
@@ -4196,14 +4212,672 @@
               <a:spcAft>
                 <a:spcPts val="1000"/>
               </a:spcAft>
-              <a:defRPr b="1" sz="1500">
+              <a:defRPr b="1" sz="1550">
+                <a:solidFill>
+                  <a:srgbClr val="0F1E4A"/>
+                </a:solidFill>
+              </a:defRPr>
+            </a:pPr>
+            <a:r>
+              <a:t>IPv4 vs IPv6 Header Comparison</a:t>
+            </a:r>
+          </a:p>
+          <a:p>
+            <a:pPr>
+              <a:spcAft>
+                <a:spcPts val="500"/>
+              </a:spcAft>
+              <a:defRPr sz="1200">
+                <a:solidFill>
+                  <a:srgbClr val="0F172A"/>
+                </a:solidFill>
+              </a:defRPr>
+            </a:pPr>
+            <a:r>
+              <a:t>• Address Size: IPv4: 32 bits (4 Bytes) vs IPv6: 128 bits (16 Bytes)</a:t>
+            </a:r>
+          </a:p>
+          <a:p>
+            <a:pPr>
+              <a:spcAft>
+                <a:spcPts val="500"/>
+              </a:spcAft>
+              <a:defRPr sz="1200">
+                <a:solidFill>
+                  <a:srgbClr val="0F172A"/>
+                </a:solidFill>
+              </a:defRPr>
+            </a:pPr>
+            <a:r>
+              <a:t>• Header Length: IPv4: Variable 20-60B (IHL field) vs IPv6: Fixed 40 Bytes</a:t>
+            </a:r>
+          </a:p>
+          <a:p>
+            <a:pPr>
+              <a:spcAft>
+                <a:spcPts val="500"/>
+              </a:spcAft>
+              <a:defRPr sz="1200">
+                <a:solidFill>
+                  <a:srgbClr val="0F172A"/>
+                </a:solidFill>
+              </a:defRPr>
+            </a:pPr>
+            <a:r>
+              <a:t>• Checksum: IPv4: 16-bit header checksum vs IPv6: Removed entirely</a:t>
+            </a:r>
+          </a:p>
+          <a:p>
+            <a:pPr>
+              <a:spcAft>
+                <a:spcPts val="500"/>
+              </a:spcAft>
+              <a:defRPr sz="1200">
+                <a:solidFill>
+                  <a:srgbClr val="0F172A"/>
+                </a:solidFill>
+              </a:defRPr>
+            </a:pPr>
+            <a:r>
+              <a:t>• Fragmentation: IPv4: Routers fragment packets vs IPv6: End systems only (PMTUD)</a:t>
+            </a:r>
+          </a:p>
+          <a:p>
+            <a:pPr>
+              <a:spcAft>
+                <a:spcPts val="500"/>
+              </a:spcAft>
+              <a:defRPr sz="1200">
+                <a:solidFill>
+                  <a:srgbClr val="0F172A"/>
+                </a:solidFill>
+              </a:defRPr>
+            </a:pPr>
+            <a:r>
+              <a:t>• Broadcast: IPv4: Broadcast supported vs IPv6: Replaced by Multicast &amp; Anycast</a:t>
+            </a:r>
+          </a:p>
+        </p:txBody>
+      </p:sp>
+      <p:sp>
+        <p:nvSpPr>
+          <p:cNvPr id="8" name="Rounded Rectangle 7"/>
+          <p:cNvSpPr/>
+          <p:nvPr/>
+        </p:nvSpPr>
+        <p:spPr>
+          <a:xfrm>
+            <a:off x="6309360" y="1234440"/>
+            <a:ext cx="5212080" cy="4892040"/>
+          </a:xfrm>
+          <a:prstGeom prst="roundRect">
+            <a:avLst/>
+          </a:prstGeom>
+          <a:solidFill>
+            <a:srgbClr val="EEF2FF"/>
+          </a:solidFill>
+          <a:ln w="19050">
+            <a:solidFill>
+              <a:srgbClr val="0E7490"/>
+            </a:solidFill>
+          </a:ln>
+        </p:spPr>
+        <p:style>
+          <a:lnRef idx="1">
+            <a:schemeClr val="accent1"/>
+          </a:lnRef>
+          <a:fillRef idx="3">
+            <a:schemeClr val="accent1"/>
+          </a:fillRef>
+          <a:effectRef idx="2">
+            <a:schemeClr val="accent1"/>
+          </a:effectRef>
+          <a:fontRef idx="minor">
+            <a:schemeClr val="lt1"/>
+          </a:fontRef>
+        </p:style>
+        <p:txBody>
+          <a:bodyPr rtlCol="0" anchor="ctr"/>
+          <a:lstStyle/>
+          <a:p>
+            <a:pPr algn="ctr"/>
+          </a:p>
+        </p:txBody>
+      </p:sp>
+      <p:sp>
+        <p:nvSpPr>
+          <p:cNvPr id="9" name="TextBox 8"/>
+          <p:cNvSpPr txBox="1"/>
+          <p:nvPr/>
+        </p:nvSpPr>
+        <p:spPr>
+          <a:xfrm>
+            <a:off x="6492240" y="1371600"/>
+            <a:ext cx="4846320" cy="4572000"/>
+          </a:xfrm>
+          <a:prstGeom prst="rect">
+            <a:avLst/>
+          </a:prstGeom>
+          <a:noFill/>
+        </p:spPr>
+        <p:txBody>
+          <a:bodyPr wrap="square">
+            <a:spAutoFit/>
+          </a:bodyPr>
+          <a:lstStyle/>
+          <a:p>
+            <a:pPr>
+              <a:spcAft>
+                <a:spcPts val="1000"/>
+              </a:spcAft>
+              <a:defRPr b="1" sz="1550">
                 <a:solidFill>
                   <a:srgbClr val="0E7490"/>
                 </a:solidFill>
               </a:defRPr>
             </a:pPr>
             <a:r>
-              <a:t>Transition Strategies</a:t>
+              <a:t>IPv4 to IPv6 Migration Mechanisms</a:t>
+            </a:r>
+          </a:p>
+          <a:p>
+            <a:pPr>
+              <a:spcAft>
+                <a:spcPts val="500"/>
+              </a:spcAft>
+              <a:defRPr sz="1200">
+                <a:solidFill>
+                  <a:srgbClr val="0F172A"/>
+                </a:solidFill>
+              </a:defRPr>
+            </a:pPr>
+            <a:r>
+              <a:t>• Dual Stack: Nodes run both IPv4 and IPv6 protocol stacks simultaneously on all interfaces</a:t>
+            </a:r>
+          </a:p>
+          <a:p>
+            <a:pPr>
+              <a:spcAft>
+                <a:spcPts val="500"/>
+              </a:spcAft>
+              <a:defRPr sz="1200">
+                <a:solidFill>
+                  <a:srgbClr val="0F172A"/>
+                </a:solidFill>
+              </a:defRPr>
+            </a:pPr>
+            <a:r>
+              <a:t>• Tunneling (6to4 / Teredo): IPv6 datagrams encapsulated as payload inside IPv4 packets across legacy IPv4 transit networks</a:t>
+            </a:r>
+          </a:p>
+          <a:p>
+            <a:pPr>
+              <a:spcAft>
+                <a:spcPts val="500"/>
+              </a:spcAft>
+              <a:defRPr sz="1200">
+                <a:solidFill>
+                  <a:srgbClr val="0F172A"/>
+                </a:solidFill>
+              </a:defRPr>
+            </a:pPr>
+            <a:r>
+              <a:t>• Header Translation (NAT64/DNS64): Translates IPv6 packet headers directly to IPv4 headers for legacy server interoperation</a:t>
+            </a:r>
+          </a:p>
+        </p:txBody>
+      </p:sp>
+      <p:sp>
+        <p:nvSpPr>
+          <p:cNvPr id="10" name="TextBox 9"/>
+          <p:cNvSpPr txBox="1"/>
+          <p:nvPr/>
+        </p:nvSpPr>
+        <p:spPr>
+          <a:xfrm>
+            <a:off x="731520" y="6327648"/>
+            <a:ext cx="10789920" cy="320040"/>
+          </a:xfrm>
+          <a:prstGeom prst="rect">
+            <a:avLst/>
+          </a:prstGeom>
+          <a:noFill/>
+        </p:spPr>
+        <p:txBody>
+          <a:bodyPr wrap="none">
+            <a:spAutoFit/>
+          </a:bodyPr>
+          <a:lstStyle/>
+          <a:p>
+            <a:pPr>
+              <a:defRPr sz="950">
+                <a:solidFill>
+                  <a:srgbClr val="64748B"/>
+                </a:solidFill>
+              </a:defRPr>
+            </a:pPr>
+            <a:r>
+              <a:t>PCCST501 Computer Networks | KTU 2024 Scheme | Prof. Anju Markose | Assistant Professor, Dept. of CSE | VJCET</a:t>
+            </a:r>
+          </a:p>
+        </p:txBody>
+      </p:sp>
+      <p:sp>
+        <p:nvSpPr>
+          <p:cNvPr id="11" name="TextBox 10"/>
+          <p:cNvSpPr txBox="1"/>
+          <p:nvPr/>
+        </p:nvSpPr>
+        <p:spPr>
+          <a:xfrm>
+            <a:off x="6858000" y="6327648"/>
+            <a:ext cx="4572000" cy="320040"/>
+          </a:xfrm>
+          <a:prstGeom prst="rect">
+            <a:avLst/>
+          </a:prstGeom>
+          <a:noFill/>
+        </p:spPr>
+        <p:txBody>
+          <a:bodyPr wrap="none">
+            <a:spAutoFit/>
+          </a:bodyPr>
+          <a:lstStyle/>
+          <a:p>
+            <a:pPr algn="r">
+              <a:defRPr sz="950">
+                <a:solidFill>
+                  <a:srgbClr val="64748B"/>
+                </a:solidFill>
+              </a:defRPr>
+            </a:pPr>
+            <a:r>
+              <a:t>Dept. of CSE, VJCET</a:t>
+            </a:r>
+          </a:p>
+        </p:txBody>
+      </p:sp>
+    </p:spTree>
+  </p:cSld>
+  <p:clrMapOvr>
+    <a:masterClrMapping/>
+  </p:clrMapOvr>
+</p:sld>
+</file>
+
+<file path=ppt/slides/slide4.xml><?xml version="1.0" encoding="utf-8"?>
+<p:sld xmlns:a="http://schemas.openxmlformats.org/drawingml/2006/main" xmlns:p="http://schemas.openxmlformats.org/presentationml/2006/main" xmlns:r="http://schemas.openxmlformats.org/officeDocument/2006/relationships">
+  <p:cSld>
+    <p:spTree>
+      <p:nvGrpSpPr>
+        <p:cNvPr id="1" name=""/>
+        <p:cNvGrpSpPr/>
+        <p:nvPr/>
+      </p:nvGrpSpPr>
+      <p:grpSpPr/>
+      <p:sp>
+        <p:nvSpPr>
+          <p:cNvPr id="2" name="Rectangle 1"/>
+          <p:cNvSpPr/>
+          <p:nvPr/>
+        </p:nvSpPr>
+        <p:spPr>
+          <a:xfrm>
+            <a:off x="0" y="0"/>
+            <a:ext cx="12191695" cy="1005840"/>
+          </a:xfrm>
+          <a:prstGeom prst="rect">
+            <a:avLst/>
+          </a:prstGeom>
+          <a:solidFill>
+            <a:srgbClr val="0F1E4A"/>
+          </a:solidFill>
+          <a:ln>
+            <a:noFill/>
+          </a:ln>
+        </p:spPr>
+        <p:style>
+          <a:lnRef idx="1">
+            <a:schemeClr val="accent1"/>
+          </a:lnRef>
+          <a:fillRef idx="3">
+            <a:schemeClr val="accent1"/>
+          </a:fillRef>
+          <a:effectRef idx="2">
+            <a:schemeClr val="accent1"/>
+          </a:effectRef>
+          <a:fontRef idx="minor">
+            <a:schemeClr val="lt1"/>
+          </a:fontRef>
+        </p:style>
+        <p:txBody>
+          <a:bodyPr rtlCol="0" anchor="ctr"/>
+          <a:lstStyle/>
+          <a:p>
+            <a:pPr algn="ctr"/>
+          </a:p>
+        </p:txBody>
+      </p:sp>
+      <p:sp>
+        <p:nvSpPr>
+          <p:cNvPr id="3" name="Rectangle 2"/>
+          <p:cNvSpPr/>
+          <p:nvPr/>
+        </p:nvSpPr>
+        <p:spPr>
+          <a:xfrm>
+            <a:off x="0" y="969264"/>
+            <a:ext cx="12191695" cy="36576"/>
+          </a:xfrm>
+          <a:prstGeom prst="rect">
+            <a:avLst/>
+          </a:prstGeom>
+          <a:solidFill>
+            <a:srgbClr val="D97706"/>
+          </a:solidFill>
+          <a:ln>
+            <a:noFill/>
+          </a:ln>
+        </p:spPr>
+        <p:style>
+          <a:lnRef idx="1">
+            <a:schemeClr val="accent1"/>
+          </a:lnRef>
+          <a:fillRef idx="3">
+            <a:schemeClr val="accent1"/>
+          </a:fillRef>
+          <a:effectRef idx="2">
+            <a:schemeClr val="accent1"/>
+          </a:effectRef>
+          <a:fontRef idx="minor">
+            <a:schemeClr val="lt1"/>
+          </a:fontRef>
+        </p:style>
+        <p:txBody>
+          <a:bodyPr rtlCol="0" anchor="ctr"/>
+          <a:lstStyle/>
+          <a:p>
+            <a:pPr algn="ctr"/>
+          </a:p>
+        </p:txBody>
+      </p:sp>
+      <p:sp>
+        <p:nvSpPr>
+          <p:cNvPr id="4" name="TextBox 3"/>
+          <p:cNvSpPr txBox="1"/>
+          <p:nvPr/>
+        </p:nvSpPr>
+        <p:spPr>
+          <a:xfrm>
+            <a:off x="731520" y="164592"/>
+            <a:ext cx="8412480" cy="685800"/>
+          </a:xfrm>
+          <a:prstGeom prst="rect">
+            <a:avLst/>
+          </a:prstGeom>
+          <a:noFill/>
+        </p:spPr>
+        <p:txBody>
+          <a:bodyPr wrap="none">
+            <a:spAutoFit/>
+          </a:bodyPr>
+          <a:lstStyle/>
+          <a:p>
+            <a:pPr>
+              <a:defRPr b="1" sz="2100">
+                <a:solidFill>
+                  <a:srgbClr val="F8FAFC"/>
+                </a:solidFill>
+              </a:defRPr>
+            </a:pPr>
+            <a:r>
+              <a:t>🎯 Exam Booster &amp; Review: IPv6 Architecture</a:t>
+            </a:r>
+          </a:p>
+        </p:txBody>
+      </p:sp>
+      <p:sp>
+        <p:nvSpPr>
+          <p:cNvPr id="5" name="TextBox 4"/>
+          <p:cNvSpPr txBox="1"/>
+          <p:nvPr/>
+        </p:nvSpPr>
+        <p:spPr>
+          <a:xfrm>
+            <a:off x="8229600" y="164592"/>
+            <a:ext cx="3291840" cy="685800"/>
+          </a:xfrm>
+          <a:prstGeom prst="rect">
+            <a:avLst/>
+          </a:prstGeom>
+          <a:noFill/>
+        </p:spPr>
+        <p:txBody>
+          <a:bodyPr wrap="none">
+            <a:spAutoFit/>
+          </a:bodyPr>
+          <a:lstStyle/>
+          <a:p>
+            <a:pPr algn="r">
+              <a:defRPr b="1" sz="1300">
+                <a:solidFill>
+                  <a:srgbClr val="D97706"/>
+                </a:solidFill>
+              </a:defRPr>
+            </a:pPr>
+            <a:r>
+              <a:t>M2.2.5</a:t>
+            </a:r>
+          </a:p>
+        </p:txBody>
+      </p:sp>
+      <p:sp>
+        <p:nvSpPr>
+          <p:cNvPr id="6" name="Rounded Rectangle 5"/>
+          <p:cNvSpPr/>
+          <p:nvPr/>
+        </p:nvSpPr>
+        <p:spPr>
+          <a:xfrm>
+            <a:off x="731520" y="1234440"/>
+            <a:ext cx="5303520" cy="4892040"/>
+          </a:xfrm>
+          <a:prstGeom prst="roundRect">
+            <a:avLst/>
+          </a:prstGeom>
+          <a:solidFill>
+            <a:srgbClr val="FEF3C7"/>
+          </a:solidFill>
+          <a:ln w="19050">
+            <a:solidFill>
+              <a:srgbClr val="D97706"/>
+            </a:solidFill>
+          </a:ln>
+        </p:spPr>
+        <p:style>
+          <a:lnRef idx="1">
+            <a:schemeClr val="accent1"/>
+          </a:lnRef>
+          <a:fillRef idx="3">
+            <a:schemeClr val="accent1"/>
+          </a:fillRef>
+          <a:effectRef idx="2">
+            <a:schemeClr val="accent1"/>
+          </a:effectRef>
+          <a:fontRef idx="minor">
+            <a:schemeClr val="lt1"/>
+          </a:fontRef>
+        </p:style>
+        <p:txBody>
+          <a:bodyPr rtlCol="0" anchor="ctr"/>
+          <a:lstStyle/>
+          <a:p>
+            <a:pPr algn="ctr"/>
+          </a:p>
+        </p:txBody>
+      </p:sp>
+      <p:sp>
+        <p:nvSpPr>
+          <p:cNvPr id="7" name="TextBox 6"/>
+          <p:cNvSpPr txBox="1"/>
+          <p:nvPr/>
+        </p:nvSpPr>
+        <p:spPr>
+          <a:xfrm>
+            <a:off x="914400" y="1371600"/>
+            <a:ext cx="4937760" cy="4572000"/>
+          </a:xfrm>
+          <a:prstGeom prst="rect">
+            <a:avLst/>
+          </a:prstGeom>
+          <a:noFill/>
+        </p:spPr>
+        <p:txBody>
+          <a:bodyPr wrap="square">
+            <a:spAutoFit/>
+          </a:bodyPr>
+          <a:lstStyle/>
+          <a:p>
+            <a:pPr>
+              <a:spcAft>
+                <a:spcPts val="1000"/>
+              </a:spcAft>
+              <a:defRPr b="1" sz="1450">
+                <a:solidFill>
+                  <a:srgbClr val="D97706"/>
+                </a:solidFill>
+              </a:defRPr>
+            </a:pPr>
+            <a:r>
+              <a:t>📚 KTU High-Yield Questions (K2 Understand)</a:t>
+            </a:r>
+          </a:p>
+          <a:p>
+            <a:pPr>
+              <a:spcAft>
+                <a:spcPts val="700"/>
+              </a:spcAft>
+              <a:defRPr sz="1200">
+                <a:solidFill>
+                  <a:srgbClr val="0F172A"/>
+                </a:solidFill>
+              </a:defRPr>
+            </a:pPr>
+            <a:r>
+              <a:t>Q: Draw the IPv6 fixed header format and explain all fields. How does it improve router forwarding performance over IPv4? (8 Marks)</a:t>
+            </a:r>
+          </a:p>
+          <a:p>
+            <a:pPr>
+              <a:spcAft>
+                <a:spcPts val="700"/>
+              </a:spcAft>
+              <a:defRPr sz="1200">
+                <a:solidFill>
+                  <a:srgbClr val="0F172A"/>
+                </a:solidFill>
+              </a:defRPr>
+            </a:pPr>
+            <a:r>
+              <a:t>Q: Compare IPv4 and IPv6 across addressing, header structure, fragmentation, and error checking. (8 Marks)</a:t>
+            </a:r>
+          </a:p>
+          <a:p>
+            <a:pPr>
+              <a:spcAft>
+                <a:spcPts val="700"/>
+              </a:spcAft>
+              <a:defRPr sz="1200">
+                <a:solidFill>
+                  <a:srgbClr val="0F172A"/>
+                </a:solidFill>
+              </a:defRPr>
+            </a:pPr>
+            <a:r>
+              <a:t>Q: Explain the three transition mechanisms from IPv4 to IPv6: Dual Stack, Tunneling, and NAT64. (7 Marks)</a:t>
+            </a:r>
+          </a:p>
+        </p:txBody>
+      </p:sp>
+      <p:sp>
+        <p:nvSpPr>
+          <p:cNvPr id="8" name="Rounded Rectangle 7"/>
+          <p:cNvSpPr/>
+          <p:nvPr/>
+        </p:nvSpPr>
+        <p:spPr>
+          <a:xfrm>
+            <a:off x="6309360" y="1234440"/>
+            <a:ext cx="5212080" cy="4892040"/>
+          </a:xfrm>
+          <a:prstGeom prst="roundRect">
+            <a:avLst/>
+          </a:prstGeom>
+          <a:solidFill>
+            <a:srgbClr val="EEF2FF"/>
+          </a:solidFill>
+          <a:ln w="19050">
+            <a:solidFill>
+              <a:srgbClr val="0E7490"/>
+            </a:solidFill>
+          </a:ln>
+        </p:spPr>
+        <p:style>
+          <a:lnRef idx="1">
+            <a:schemeClr val="accent1"/>
+          </a:lnRef>
+          <a:fillRef idx="3">
+            <a:schemeClr val="accent1"/>
+          </a:fillRef>
+          <a:effectRef idx="2">
+            <a:schemeClr val="accent1"/>
+          </a:effectRef>
+          <a:fontRef idx="minor">
+            <a:schemeClr val="lt1"/>
+          </a:fontRef>
+        </p:style>
+        <p:txBody>
+          <a:bodyPr rtlCol="0" anchor="ctr"/>
+          <a:lstStyle/>
+          <a:p>
+            <a:pPr algn="ctr"/>
+          </a:p>
+        </p:txBody>
+      </p:sp>
+      <p:sp>
+        <p:nvSpPr>
+          <p:cNvPr id="9" name="TextBox 8"/>
+          <p:cNvSpPr txBox="1"/>
+          <p:nvPr/>
+        </p:nvSpPr>
+        <p:spPr>
+          <a:xfrm>
+            <a:off x="6492240" y="1371600"/>
+            <a:ext cx="4846320" cy="4572000"/>
+          </a:xfrm>
+          <a:prstGeom prst="rect">
+            <a:avLst/>
+          </a:prstGeom>
+          <a:noFill/>
+        </p:spPr>
+        <p:txBody>
+          <a:bodyPr wrap="square">
+            <a:spAutoFit/>
+          </a:bodyPr>
+          <a:lstStyle/>
+          <a:p>
+            <a:pPr>
+              <a:spcAft>
+                <a:spcPts val="1000"/>
+              </a:spcAft>
+              <a:defRPr b="1" sz="1450">
+                <a:solidFill>
+                  <a:srgbClr val="0E7490"/>
+                </a:solidFill>
+              </a:defRPr>
+            </a:pPr>
+            <a:r>
+              <a:t>💡 Critical Conceptual Takeaways</a:t>
             </a:r>
           </a:p>
           <a:p>
@@ -4213,12 +4887,12 @@
               </a:spcAft>
               <a:defRPr sz="1200">
                 <a:solidFill>
-                  <a:srgbClr val="1E293B"/>
+                  <a:srgbClr val="0F172A"/>
                 </a:solidFill>
               </a:defRPr>
             </a:pPr>
             <a:r>
-              <a:t>→ Dual-Stack: Run IPv4 &amp; IPv6 together</a:t>
+              <a:t>✔ IPv6 fixed 40-byte header streamlines hardware ASIC forwarding.</a:t>
             </a:r>
           </a:p>
           <a:p>
@@ -4228,12 +4902,12 @@
               </a:spcAft>
               <a:defRPr sz="1200">
                 <a:solidFill>
-                  <a:srgbClr val="1E293B"/>
+                  <a:srgbClr val="0F172A"/>
                 </a:solidFill>
               </a:defRPr>
             </a:pPr>
             <a:r>
-              <a:t>→ Tunneling: Encapsulate IPv6 in IPv4</a:t>
+              <a:t>✔ Extension headers (Hop-by-Hop, Routing, Fragment, ESP, AH) are daisy-chained via `Next Header`.</a:t>
             </a:r>
           </a:p>
           <a:p>
@@ -4243,41 +4917,26 @@
               </a:spcAft>
               <a:defRPr sz="1200">
                 <a:solidFill>
-                  <a:srgbClr val="1E293B"/>
+                  <a:srgbClr val="0F172A"/>
                 </a:solidFill>
               </a:defRPr>
             </a:pPr>
             <a:r>
-              <a:t>→ Translation: NAT64/DNS64 gateway</a:t>
-            </a:r>
-          </a:p>
-          <a:p>
-            <a:pPr>
-              <a:spcAft>
-                <a:spcPts val="600"/>
-              </a:spcAft>
-              <a:defRPr sz="1200">
-                <a:solidFill>
-                  <a:srgbClr val="1E293B"/>
-                </a:solidFill>
-              </a:defRPr>
-            </a:pPr>
-            <a:r>
-              <a:t>→ SLAAC: Zero-configuration networking</a:t>
-            </a:r>
-          </a:p>
-        </p:txBody>
-      </p:sp>
-      <p:sp>
-        <p:nvSpPr>
-          <p:cNvPr id="9" name="TextBox 8"/>
+              <a:t>✔ Dual stack and encapsulation tunneling enable smooth evolutionary migration from IPv4.</a:t>
+            </a:r>
+          </a:p>
+        </p:txBody>
+      </p:sp>
+      <p:sp>
+        <p:nvSpPr>
+          <p:cNvPr id="10" name="TextBox 9"/>
           <p:cNvSpPr txBox="1"/>
           <p:nvPr/>
         </p:nvSpPr>
         <p:spPr>
           <a:xfrm>
-            <a:off x="731520" y="6309360"/>
-            <a:ext cx="10789920" cy="365760"/>
+            <a:off x="731520" y="6327648"/>
+            <a:ext cx="10789920" cy="320040"/>
           </a:xfrm>
           <a:prstGeom prst="rect">
             <a:avLst/>
@@ -4299,6 +4958,41 @@
             </a:pPr>
             <a:r>
               <a:t>PCCST501 Computer Networks | KTU 2024 Scheme | Prof. Anju Markose | Assistant Professor, Dept. of CSE | VJCET</a:t>
+            </a:r>
+          </a:p>
+        </p:txBody>
+      </p:sp>
+      <p:sp>
+        <p:nvSpPr>
+          <p:cNvPr id="11" name="TextBox 10"/>
+          <p:cNvSpPr txBox="1"/>
+          <p:nvPr/>
+        </p:nvSpPr>
+        <p:spPr>
+          <a:xfrm>
+            <a:off x="6858000" y="6327648"/>
+            <a:ext cx="4572000" cy="320040"/>
+          </a:xfrm>
+          <a:prstGeom prst="rect">
+            <a:avLst/>
+          </a:prstGeom>
+          <a:noFill/>
+        </p:spPr>
+        <p:txBody>
+          <a:bodyPr wrap="none">
+            <a:spAutoFit/>
+          </a:bodyPr>
+          <a:lstStyle/>
+          <a:p>
+            <a:pPr algn="r">
+              <a:defRPr sz="950">
+                <a:solidFill>
+                  <a:srgbClr val="64748B"/>
+                </a:solidFill>
+              </a:defRPr>
+            </a:pPr>
+            <a:r>
+              <a:t>Dept. of CSE, VJCET</a:t>
             </a:r>
           </a:p>
         </p:txBody>
